--- a/make_presentation/templates/templates/creative/_4.pptx
+++ b/make_presentation/templates/templates/creative/_4.pptx
@@ -70,19 +70,7 @@
               <a:rPr b="0" lang="en-US" sz="4400" spc="-1" strike="noStrike">
                 <a:latin typeface="Arial"/>
               </a:rPr>
-              <a:t>Click to </a:t>
-            </a:r>
-            <a:r>
-              <a:rPr b="0" lang="en-US" sz="4400" spc="-1" strike="noStrike">
-                <a:latin typeface="Arial"/>
-              </a:rPr>
-              <a:t>move </a:t>
-            </a:r>
-            <a:r>
-              <a:rPr b="0" lang="en-US" sz="4400" spc="-1" strike="noStrike">
-                <a:latin typeface="Arial"/>
-              </a:rPr>
-              <a:t>the slide</a:t>
+              <a:t>Click to move the slide</a:t>
             </a:r>
             <a:endParaRPr b="0" lang="en-US" sz="4400" spc="-1" strike="noStrike">
               <a:latin typeface="Arial"/>
@@ -122,13 +110,7 @@
               <a:rPr b="0" lang="en-US" sz="2000" spc="-1" strike="noStrike">
                 <a:latin typeface="Arial"/>
               </a:rPr>
-              <a:t>Click to edit the </a:t>
-            </a:r>
-            <a:r>
-              <a:rPr b="0" lang="en-US" sz="2000" spc="-1" strike="noStrike">
-                <a:latin typeface="Arial"/>
-              </a:rPr>
-              <a:t>notes format</a:t>
+              <a:t>Click to edit the notes format</a:t>
             </a:r>
             <a:endParaRPr b="0" lang="en-US" sz="2000" spc="-1" strike="noStrike">
               <a:latin typeface="Arial"/>
@@ -313,7 +295,7 @@
             <a:pPr algn="r">
               <a:buNone/>
             </a:pPr>
-            <a:fld id="{39C01282-2F2A-4B38-B478-BF59BB834A3F}" type="slidenum">
+            <a:fld id="{7D57273A-C88E-4FFB-82D4-5C4CDDD15CB7}" type="slidenum">
               <a:rPr b="0" lang="en-US" sz="1400" spc="-1" strike="noStrike">
                 <a:latin typeface="Times New Roman"/>
               </a:rPr>
@@ -361,7 +343,7 @@
         <p:spPr>
           <a:xfrm>
             <a:off x="685800" y="1143000"/>
-            <a:ext cx="5485680" cy="3085560"/>
+            <a:ext cx="5485320" cy="3085200"/>
           </a:xfrm>
           <a:prstGeom prst="rect">
             <a:avLst/>
@@ -384,7 +366,7 @@
         <p:spPr>
           <a:xfrm>
             <a:off x="685800" y="4400640"/>
-            <a:ext cx="5485680" cy="3599640"/>
+            <a:ext cx="5485320" cy="3599280"/>
           </a:xfrm>
           <a:prstGeom prst="rect">
             <a:avLst/>
@@ -418,7 +400,7 @@
         <p:spPr>
           <a:xfrm>
             <a:off x="3884760" y="8685360"/>
-            <a:ext cx="2971080" cy="457920"/>
+            <a:ext cx="2970720" cy="457560"/>
           </a:xfrm>
           <a:prstGeom prst="rect">
             <a:avLst/>
@@ -450,7 +432,7 @@
               </a:lnSpc>
               <a:buNone/>
             </a:pPr>
-            <a:fld id="{FDFDD543-F75D-4D37-AFA6-2A6647F07CDC}" type="slidenum">
+            <a:fld id="{371258F6-D638-4FEE-89BA-444620727CCF}" type="slidenum">
               <a:rPr b="0" lang="ru-RU" sz="1200" spc="-1" strike="noStrike">
                 <a:latin typeface="Times New Roman"/>
               </a:rPr>
@@ -497,7 +479,7 @@
         <p:spPr>
           <a:xfrm>
             <a:off x="685800" y="1143000"/>
-            <a:ext cx="5485680" cy="3085560"/>
+            <a:ext cx="5485320" cy="3085200"/>
           </a:xfrm>
           <a:prstGeom prst="rect">
             <a:avLst/>
@@ -520,7 +502,7 @@
         <p:spPr>
           <a:xfrm>
             <a:off x="685800" y="4400640"/>
-            <a:ext cx="5485680" cy="3599640"/>
+            <a:ext cx="5485320" cy="3599280"/>
           </a:xfrm>
           <a:prstGeom prst="rect">
             <a:avLst/>
@@ -554,7 +536,7 @@
         <p:spPr>
           <a:xfrm>
             <a:off x="3884760" y="8685360"/>
-            <a:ext cx="2971080" cy="457920"/>
+            <a:ext cx="2970720" cy="457560"/>
           </a:xfrm>
           <a:prstGeom prst="rect">
             <a:avLst/>
@@ -586,7 +568,7 @@
               </a:lnSpc>
               <a:buNone/>
             </a:pPr>
-            <a:fld id="{0090BEBD-615E-4090-9DE2-9F04D4ACFE12}" type="slidenum">
+            <a:fld id="{46AB6F43-5431-4D4C-8673-B2A9809F424C}" type="slidenum">
               <a:rPr b="0" lang="ru-RU" sz="1200" spc="-1" strike="noStrike">
                 <a:latin typeface="Times New Roman"/>
               </a:rPr>
@@ -654,7 +636,7 @@
         <p:txBody>
           <a:bodyPr/>
           <a:p>
-            <a:fld id="{2DF46830-D4A6-4002-9C78-D32A90EE3A5A}" type="slidenum">
+            <a:fld id="{148FA07D-2577-4C88-9C6B-545840952F38}" type="slidenum">
               <a:t>&lt;#&gt;</a:t>
             </a:fld>
           </a:p>
@@ -716,7 +698,7 @@
         <p:spPr>
           <a:xfrm>
             <a:off x="1143000" y="841680"/>
-            <a:ext cx="6857280" cy="1789920"/>
+            <a:ext cx="6856920" cy="1789560"/>
           </a:xfrm>
           <a:prstGeom prst="rect">
             <a:avLst/>
@@ -753,7 +735,7 @@
         <p:spPr>
           <a:xfrm>
             <a:off x="457200" y="1203480"/>
-            <a:ext cx="8229240" cy="1422720"/>
+            <a:ext cx="8228880" cy="1422360"/>
           </a:xfrm>
           <a:prstGeom prst="rect">
             <a:avLst/>
@@ -786,8 +768,8 @@
         </p:nvSpPr>
         <p:spPr>
           <a:xfrm>
-            <a:off x="457200" y="2761920"/>
-            <a:ext cx="8229240" cy="1422720"/>
+            <a:off x="457200" y="2761200"/>
+            <a:ext cx="8228880" cy="1422360"/>
           </a:xfrm>
           <a:prstGeom prst="rect">
             <a:avLst/>
@@ -842,7 +824,7 @@
         <p:txBody>
           <a:bodyPr/>
           <a:p>
-            <a:fld id="{13964DE3-D947-4134-805E-215CC97C5998}" type="slidenum">
+            <a:fld id="{C2182D67-7A71-4D89-808F-70AAC2C60F2C}" type="slidenum">
               <a:t>&lt;#&gt;</a:t>
             </a:fld>
           </a:p>
@@ -904,7 +886,7 @@
         <p:spPr>
           <a:xfrm>
             <a:off x="1143000" y="841680"/>
-            <a:ext cx="6857280" cy="1789920"/>
+            <a:ext cx="6856920" cy="1789560"/>
           </a:xfrm>
           <a:prstGeom prst="rect">
             <a:avLst/>
@@ -941,7 +923,7 @@
         <p:spPr>
           <a:xfrm>
             <a:off x="457200" y="1203480"/>
-            <a:ext cx="4015800" cy="1422720"/>
+            <a:ext cx="4015440" cy="1422360"/>
           </a:xfrm>
           <a:prstGeom prst="rect">
             <a:avLst/>
@@ -974,8 +956,8 @@
         </p:nvSpPr>
         <p:spPr>
           <a:xfrm>
-            <a:off x="4674240" y="1203480"/>
-            <a:ext cx="4015800" cy="1422720"/>
+            <a:off x="4673880" y="1203480"/>
+            <a:ext cx="4015440" cy="1422360"/>
           </a:xfrm>
           <a:prstGeom prst="rect">
             <a:avLst/>
@@ -1008,8 +990,8 @@
         </p:nvSpPr>
         <p:spPr>
           <a:xfrm>
-            <a:off x="457200" y="2761920"/>
-            <a:ext cx="4015800" cy="1422720"/>
+            <a:off x="457200" y="2761200"/>
+            <a:ext cx="4015440" cy="1422360"/>
           </a:xfrm>
           <a:prstGeom prst="rect">
             <a:avLst/>
@@ -1042,8 +1024,8 @@
         </p:nvSpPr>
         <p:spPr>
           <a:xfrm>
-            <a:off x="4674240" y="2761920"/>
-            <a:ext cx="4015800" cy="1422720"/>
+            <a:off x="4673880" y="2761200"/>
+            <a:ext cx="4015440" cy="1422360"/>
           </a:xfrm>
           <a:prstGeom prst="rect">
             <a:avLst/>
@@ -1098,7 +1080,7 @@
         <p:txBody>
           <a:bodyPr/>
           <a:p>
-            <a:fld id="{1F1C7A2C-9BC5-4567-B78A-50283F5140D6}" type="slidenum">
+            <a:fld id="{9319E059-3270-4542-9501-C4DEE0C8A916}" type="slidenum">
               <a:t>&lt;#&gt;</a:t>
             </a:fld>
           </a:p>
@@ -1160,7 +1142,7 @@
         <p:spPr>
           <a:xfrm>
             <a:off x="1143000" y="841680"/>
-            <a:ext cx="6857280" cy="1789920"/>
+            <a:ext cx="6856920" cy="1789560"/>
           </a:xfrm>
           <a:prstGeom prst="rect">
             <a:avLst/>
@@ -1197,7 +1179,7 @@
         <p:spPr>
           <a:xfrm>
             <a:off x="457200" y="1203480"/>
-            <a:ext cx="2649600" cy="1422720"/>
+            <a:ext cx="2649600" cy="1422360"/>
           </a:xfrm>
           <a:prstGeom prst="rect">
             <a:avLst/>
@@ -1231,7 +1213,7 @@
         <p:spPr>
           <a:xfrm>
             <a:off x="3239640" y="1203480"/>
-            <a:ext cx="2649600" cy="1422720"/>
+            <a:ext cx="2649600" cy="1422360"/>
           </a:xfrm>
           <a:prstGeom prst="rect">
             <a:avLst/>
@@ -1265,7 +1247,7 @@
         <p:spPr>
           <a:xfrm>
             <a:off x="6022080" y="1203480"/>
-            <a:ext cx="2649600" cy="1422720"/>
+            <a:ext cx="2649600" cy="1422360"/>
           </a:xfrm>
           <a:prstGeom prst="rect">
             <a:avLst/>
@@ -1298,8 +1280,8 @@
         </p:nvSpPr>
         <p:spPr>
           <a:xfrm>
-            <a:off x="457200" y="2761920"/>
-            <a:ext cx="2649600" cy="1422720"/>
+            <a:off x="457200" y="2761200"/>
+            <a:ext cx="2649600" cy="1422360"/>
           </a:xfrm>
           <a:prstGeom prst="rect">
             <a:avLst/>
@@ -1332,8 +1314,8 @@
         </p:nvSpPr>
         <p:spPr>
           <a:xfrm>
-            <a:off x="3239640" y="2761920"/>
-            <a:ext cx="2649600" cy="1422720"/>
+            <a:off x="3239640" y="2761200"/>
+            <a:ext cx="2649600" cy="1422360"/>
           </a:xfrm>
           <a:prstGeom prst="rect">
             <a:avLst/>
@@ -1366,8 +1348,8 @@
         </p:nvSpPr>
         <p:spPr>
           <a:xfrm>
-            <a:off x="6022080" y="2761920"/>
-            <a:ext cx="2649600" cy="1422720"/>
+            <a:off x="6022080" y="2761200"/>
+            <a:ext cx="2649600" cy="1422360"/>
           </a:xfrm>
           <a:prstGeom prst="rect">
             <a:avLst/>
@@ -1422,7 +1404,7 @@
         <p:txBody>
           <a:bodyPr/>
           <a:p>
-            <a:fld id="{19CC790C-1CC3-44ED-B762-E7F1FC74F54E}" type="slidenum">
+            <a:fld id="{1B7BF016-5726-4FC7-951A-6867F55FDAAB}" type="slidenum">
               <a:t>&lt;#&gt;</a:t>
             </a:fld>
           </a:p>
@@ -1484,7 +1466,7 @@
         <p:spPr>
           <a:xfrm>
             <a:off x="1143000" y="841680"/>
-            <a:ext cx="6857280" cy="1789920"/>
+            <a:ext cx="6856920" cy="1789560"/>
           </a:xfrm>
           <a:prstGeom prst="rect">
             <a:avLst/>
@@ -1521,7 +1503,7 @@
         <p:spPr>
           <a:xfrm>
             <a:off x="457200" y="1203480"/>
-            <a:ext cx="8229240" cy="2982960"/>
+            <a:ext cx="8228880" cy="2982600"/>
           </a:xfrm>
           <a:prstGeom prst="rect">
             <a:avLst/>
@@ -1579,7 +1561,7 @@
         <p:txBody>
           <a:bodyPr/>
           <a:p>
-            <a:fld id="{F4D9D2C1-54EB-4DF0-AD9D-FBFDBC001A0F}" type="slidenum">
+            <a:fld id="{027727AA-0B7E-4316-9465-D41907BF9B00}" type="slidenum">
               <a:t>&lt;#&gt;</a:t>
             </a:fld>
           </a:p>
@@ -1641,7 +1623,7 @@
         <p:spPr>
           <a:xfrm>
             <a:off x="1143000" y="841680"/>
-            <a:ext cx="6857280" cy="1789920"/>
+            <a:ext cx="6856920" cy="1789560"/>
           </a:xfrm>
           <a:prstGeom prst="rect">
             <a:avLst/>
@@ -1678,7 +1660,7 @@
         <p:spPr>
           <a:xfrm>
             <a:off x="457200" y="1203480"/>
-            <a:ext cx="8229240" cy="2982960"/>
+            <a:ext cx="8228880" cy="2982600"/>
           </a:xfrm>
           <a:prstGeom prst="rect">
             <a:avLst/>
@@ -1733,7 +1715,7 @@
         <p:txBody>
           <a:bodyPr/>
           <a:p>
-            <a:fld id="{54E3D6F4-59F3-4F87-AE3B-AE2681EE0BA1}" type="slidenum">
+            <a:fld id="{D5BA3E1C-FDE7-4030-8504-DCD27B31662D}" type="slidenum">
               <a:t>&lt;#&gt;</a:t>
             </a:fld>
           </a:p>
@@ -1795,7 +1777,7 @@
         <p:spPr>
           <a:xfrm>
             <a:off x="1143000" y="841680"/>
-            <a:ext cx="6857280" cy="1789920"/>
+            <a:ext cx="6856920" cy="1789560"/>
           </a:xfrm>
           <a:prstGeom prst="rect">
             <a:avLst/>
@@ -1832,7 +1814,7 @@
         <p:spPr>
           <a:xfrm>
             <a:off x="457200" y="1203480"/>
-            <a:ext cx="4015800" cy="2982960"/>
+            <a:ext cx="4015440" cy="2982600"/>
           </a:xfrm>
           <a:prstGeom prst="rect">
             <a:avLst/>
@@ -1865,8 +1847,8 @@
         </p:nvSpPr>
         <p:spPr>
           <a:xfrm>
-            <a:off x="4674240" y="1203480"/>
-            <a:ext cx="4015800" cy="2982960"/>
+            <a:off x="4673880" y="1203480"/>
+            <a:ext cx="4015440" cy="2982600"/>
           </a:xfrm>
           <a:prstGeom prst="rect">
             <a:avLst/>
@@ -1921,7 +1903,7 @@
         <p:txBody>
           <a:bodyPr/>
           <a:p>
-            <a:fld id="{79176A8C-FD39-418F-A172-4827804123BE}" type="slidenum">
+            <a:fld id="{A7649964-3781-4935-8DB6-D0B992FA0125}" type="slidenum">
               <a:t>&lt;#&gt;</a:t>
             </a:fld>
           </a:p>
@@ -1983,7 +1965,7 @@
         <p:spPr>
           <a:xfrm>
             <a:off x="1143000" y="841680"/>
-            <a:ext cx="6857280" cy="1789920"/>
+            <a:ext cx="6856920" cy="1789560"/>
           </a:xfrm>
           <a:prstGeom prst="rect">
             <a:avLst/>
@@ -2041,7 +2023,7 @@
         <p:txBody>
           <a:bodyPr/>
           <a:p>
-            <a:fld id="{E5B99C85-611E-4E5B-AB71-35EBE65D3138}" type="slidenum">
+            <a:fld id="{EBF47444-9E52-4D2A-9640-37575E772ECB}" type="slidenum">
               <a:t>&lt;#&gt;</a:t>
             </a:fld>
           </a:p>
@@ -2103,7 +2085,7 @@
         <p:spPr>
           <a:xfrm>
             <a:off x="1143000" y="841680"/>
-            <a:ext cx="6857280" cy="8298360"/>
+            <a:ext cx="6856920" cy="8296560"/>
           </a:xfrm>
           <a:prstGeom prst="rect">
             <a:avLst/>
@@ -2161,7 +2143,7 @@
         <p:txBody>
           <a:bodyPr/>
           <a:p>
-            <a:fld id="{EF764E29-969E-469E-9EA1-00245FBC25B8}" type="slidenum">
+            <a:fld id="{33F21107-C53F-46D0-A6FE-BC1CAE272C47}" type="slidenum">
               <a:t>&lt;#&gt;</a:t>
             </a:fld>
           </a:p>
@@ -2223,7 +2205,7 @@
         <p:spPr>
           <a:xfrm>
             <a:off x="1143000" y="841680"/>
-            <a:ext cx="6857280" cy="1789920"/>
+            <a:ext cx="6856920" cy="1789560"/>
           </a:xfrm>
           <a:prstGeom prst="rect">
             <a:avLst/>
@@ -2260,7 +2242,7 @@
         <p:spPr>
           <a:xfrm>
             <a:off x="457200" y="1203480"/>
-            <a:ext cx="4015800" cy="1422720"/>
+            <a:ext cx="4015440" cy="1422360"/>
           </a:xfrm>
           <a:prstGeom prst="rect">
             <a:avLst/>
@@ -2293,8 +2275,8 @@
         </p:nvSpPr>
         <p:spPr>
           <a:xfrm>
-            <a:off x="4674240" y="1203480"/>
-            <a:ext cx="4015800" cy="2982960"/>
+            <a:off x="4673880" y="1203480"/>
+            <a:ext cx="4015440" cy="2982600"/>
           </a:xfrm>
           <a:prstGeom prst="rect">
             <a:avLst/>
@@ -2327,8 +2309,8 @@
         </p:nvSpPr>
         <p:spPr>
           <a:xfrm>
-            <a:off x="457200" y="2761920"/>
-            <a:ext cx="4015800" cy="1422720"/>
+            <a:off x="457200" y="2761200"/>
+            <a:ext cx="4015440" cy="1422360"/>
           </a:xfrm>
           <a:prstGeom prst="rect">
             <a:avLst/>
@@ -2383,7 +2365,7 @@
         <p:txBody>
           <a:bodyPr/>
           <a:p>
-            <a:fld id="{8527E133-34F2-4238-AABB-8D2655CD8DDB}" type="slidenum">
+            <a:fld id="{E5A5D183-D5D7-42BA-9F8A-A08263108232}" type="slidenum">
               <a:t>&lt;#&gt;</a:t>
             </a:fld>
           </a:p>
@@ -2445,7 +2427,7 @@
         <p:spPr>
           <a:xfrm>
             <a:off x="1143000" y="841680"/>
-            <a:ext cx="6857280" cy="1789920"/>
+            <a:ext cx="6856920" cy="1789560"/>
           </a:xfrm>
           <a:prstGeom prst="rect">
             <a:avLst/>
@@ -2482,7 +2464,7 @@
         <p:spPr>
           <a:xfrm>
             <a:off x="457200" y="1203480"/>
-            <a:ext cx="4015800" cy="2982960"/>
+            <a:ext cx="4015440" cy="2982600"/>
           </a:xfrm>
           <a:prstGeom prst="rect">
             <a:avLst/>
@@ -2515,8 +2497,8 @@
         </p:nvSpPr>
         <p:spPr>
           <a:xfrm>
-            <a:off x="4674240" y="1203480"/>
-            <a:ext cx="4015800" cy="1422720"/>
+            <a:off x="4673880" y="1203480"/>
+            <a:ext cx="4015440" cy="1422360"/>
           </a:xfrm>
           <a:prstGeom prst="rect">
             <a:avLst/>
@@ -2549,8 +2531,8 @@
         </p:nvSpPr>
         <p:spPr>
           <a:xfrm>
-            <a:off x="4674240" y="2761920"/>
-            <a:ext cx="4015800" cy="1422720"/>
+            <a:off x="4673880" y="2761200"/>
+            <a:ext cx="4015440" cy="1422360"/>
           </a:xfrm>
           <a:prstGeom prst="rect">
             <a:avLst/>
@@ -2605,7 +2587,7 @@
         <p:txBody>
           <a:bodyPr/>
           <a:p>
-            <a:fld id="{CAE79D50-91C2-4E15-86B9-9B8966EE82B6}" type="slidenum">
+            <a:fld id="{296DA880-8FBC-4F52-B5A8-7BFA534BF0EB}" type="slidenum">
               <a:t>&lt;#&gt;</a:t>
             </a:fld>
           </a:p>
@@ -2667,7 +2649,7 @@
         <p:spPr>
           <a:xfrm>
             <a:off x="1143000" y="841680"/>
-            <a:ext cx="6857280" cy="1789920"/>
+            <a:ext cx="6856920" cy="1789560"/>
           </a:xfrm>
           <a:prstGeom prst="rect">
             <a:avLst/>
@@ -2704,7 +2686,7 @@
         <p:spPr>
           <a:xfrm>
             <a:off x="457200" y="1203480"/>
-            <a:ext cx="4015800" cy="1422720"/>
+            <a:ext cx="4015440" cy="1422360"/>
           </a:xfrm>
           <a:prstGeom prst="rect">
             <a:avLst/>
@@ -2737,8 +2719,8 @@
         </p:nvSpPr>
         <p:spPr>
           <a:xfrm>
-            <a:off x="4674240" y="1203480"/>
-            <a:ext cx="4015800" cy="1422720"/>
+            <a:off x="4673880" y="1203480"/>
+            <a:ext cx="4015440" cy="1422360"/>
           </a:xfrm>
           <a:prstGeom prst="rect">
             <a:avLst/>
@@ -2771,8 +2753,8 @@
         </p:nvSpPr>
         <p:spPr>
           <a:xfrm>
-            <a:off x="457200" y="2761920"/>
-            <a:ext cx="8229240" cy="1422720"/>
+            <a:off x="457200" y="2761200"/>
+            <a:ext cx="8228880" cy="1422360"/>
           </a:xfrm>
           <a:prstGeom prst="rect">
             <a:avLst/>
@@ -2827,7 +2809,7 @@
         <p:txBody>
           <a:bodyPr/>
           <a:p>
-            <a:fld id="{CF676FFE-2BD9-43A2-895D-2E028B98AF95}" type="slidenum">
+            <a:fld id="{9E8E7877-BDEE-4EBF-8E6F-805363DE33AC}" type="slidenum">
               <a:t>&lt;#&gt;</a:t>
             </a:fld>
           </a:p>
@@ -2896,7 +2878,7 @@
         <p:spPr>
           <a:xfrm>
             <a:off x="1143000" y="841680"/>
-            <a:ext cx="6857280" cy="1789920"/>
+            <a:ext cx="6856920" cy="1789560"/>
           </a:xfrm>
           <a:prstGeom prst="rect">
             <a:avLst/>
@@ -2915,23 +2897,200 @@
               <a:rPr b="0" lang="en-US" sz="1800" spc="-1" strike="noStrike">
                 <a:latin typeface="Arial"/>
               </a:rPr>
-              <a:t>Click to edit the title text </a:t>
-            </a:r>
+              <a:t>Click to edit the title text format</a:t>
+            </a:r>
+            <a:endParaRPr b="0" lang="en-US" sz="1800" spc="-1" strike="noStrike">
+              <a:latin typeface="Arial"/>
+            </a:endParaRPr>
+          </a:p>
+        </p:txBody>
+      </p:sp>
+      <p:sp>
+        <p:nvSpPr>
+          <p:cNvPr id="1" name="PlaceHolder 2"/>
+          <p:cNvSpPr>
+            <a:spLocks noGrp="1"/>
+          </p:cNvSpPr>
+          <p:nvPr>
+            <p:ph type="body"/>
+          </p:nvPr>
+        </p:nvSpPr>
+        <p:spPr>
+          <a:xfrm>
+            <a:off x="457200" y="1203480"/>
+            <a:ext cx="8228880" cy="2982600"/>
+          </a:xfrm>
+          <a:prstGeom prst="rect">
+            <a:avLst/>
+          </a:prstGeom>
+          <a:noFill/>
+          <a:ln w="0">
+            <a:noFill/>
+          </a:ln>
+        </p:spPr>
+        <p:txBody>
+          <a:bodyPr lIns="0" rIns="0" tIns="0" bIns="0" anchor="t">
+            <a:normAutofit/>
+          </a:bodyPr>
+          <a:p>
+            <a:pPr marL="432000" indent="-324000">
+              <a:spcBef>
+                <a:spcPts val="1417"/>
+              </a:spcBef>
+              <a:buClr>
+                <a:srgbClr val="000000"/>
+              </a:buClr>
+              <a:buSzPct val="45000"/>
+              <a:buFont typeface="Wingdings" charset="2"/>
+              <a:buChar char=""/>
+            </a:pPr>
             <a:r>
               <a:rPr b="0" lang="en-US" sz="1800" spc="-1" strike="noStrike">
                 <a:latin typeface="Arial"/>
               </a:rPr>
-              <a:t>format</a:t>
+              <a:t>Click to edit the outline text format</a:t>
             </a:r>
             <a:endParaRPr b="0" lang="en-US" sz="1800" spc="-1" strike="noStrike">
               <a:latin typeface="Arial"/>
             </a:endParaRPr>
           </a:p>
-        </p:txBody>
-      </p:sp>
-      <p:sp>
-        <p:nvSpPr>
-          <p:cNvPr id="1" name="PlaceHolder 2"/>
+          <a:p>
+            <a:pPr lvl="1" marL="864000" indent="-324000">
+              <a:spcBef>
+                <a:spcPts val="1134"/>
+              </a:spcBef>
+              <a:buClr>
+                <a:srgbClr val="000000"/>
+              </a:buClr>
+              <a:buSzPct val="75000"/>
+              <a:buFont typeface="Symbol" charset="2"/>
+              <a:buChar char=""/>
+            </a:pPr>
+            <a:r>
+              <a:rPr b="0" lang="en-US" sz="1800" spc="-1" strike="noStrike">
+                <a:latin typeface="Arial"/>
+              </a:rPr>
+              <a:t>Second Outline Level</a:t>
+            </a:r>
+            <a:endParaRPr b="0" lang="en-US" sz="1800" spc="-1" strike="noStrike">
+              <a:latin typeface="Arial"/>
+            </a:endParaRPr>
+          </a:p>
+          <a:p>
+            <a:pPr lvl="2" marL="1296000" indent="-288000">
+              <a:spcBef>
+                <a:spcPts val="850"/>
+              </a:spcBef>
+              <a:buClr>
+                <a:srgbClr val="000000"/>
+              </a:buClr>
+              <a:buSzPct val="45000"/>
+              <a:buFont typeface="Wingdings" charset="2"/>
+              <a:buChar char=""/>
+            </a:pPr>
+            <a:r>
+              <a:rPr b="0" lang="en-US" sz="1800" spc="-1" strike="noStrike">
+                <a:latin typeface="Arial"/>
+              </a:rPr>
+              <a:t>Third Outline Level</a:t>
+            </a:r>
+            <a:endParaRPr b="0" lang="en-US" sz="1800" spc="-1" strike="noStrike">
+              <a:latin typeface="Arial"/>
+            </a:endParaRPr>
+          </a:p>
+          <a:p>
+            <a:pPr lvl="3" marL="1728000" indent="-216000">
+              <a:spcBef>
+                <a:spcPts val="567"/>
+              </a:spcBef>
+              <a:buClr>
+                <a:srgbClr val="000000"/>
+              </a:buClr>
+              <a:buSzPct val="75000"/>
+              <a:buFont typeface="Symbol" charset="2"/>
+              <a:buChar char=""/>
+            </a:pPr>
+            <a:r>
+              <a:rPr b="0" lang="en-US" sz="1800" spc="-1" strike="noStrike">
+                <a:latin typeface="Arial"/>
+              </a:rPr>
+              <a:t>Fourth Outline Level</a:t>
+            </a:r>
+            <a:endParaRPr b="0" lang="en-US" sz="1800" spc="-1" strike="noStrike">
+              <a:latin typeface="Arial"/>
+            </a:endParaRPr>
+          </a:p>
+          <a:p>
+            <a:pPr lvl="4" marL="2160000" indent="-216000">
+              <a:spcBef>
+                <a:spcPts val="283"/>
+              </a:spcBef>
+              <a:buClr>
+                <a:srgbClr val="000000"/>
+              </a:buClr>
+              <a:buSzPct val="45000"/>
+              <a:buFont typeface="Wingdings" charset="2"/>
+              <a:buChar char=""/>
+            </a:pPr>
+            <a:r>
+              <a:rPr b="0" lang="en-US" sz="1800" spc="-1" strike="noStrike">
+                <a:latin typeface="Arial"/>
+              </a:rPr>
+              <a:t>Fifth Outline Level</a:t>
+            </a:r>
+            <a:endParaRPr b="0" lang="en-US" sz="1800" spc="-1" strike="noStrike">
+              <a:latin typeface="Arial"/>
+            </a:endParaRPr>
+          </a:p>
+          <a:p>
+            <a:pPr lvl="5" marL="2592000" indent="-216000">
+              <a:spcBef>
+                <a:spcPts val="283"/>
+              </a:spcBef>
+              <a:buClr>
+                <a:srgbClr val="000000"/>
+              </a:buClr>
+              <a:buSzPct val="45000"/>
+              <a:buFont typeface="Wingdings" charset="2"/>
+              <a:buChar char=""/>
+            </a:pPr>
+            <a:r>
+              <a:rPr b="0" lang="en-US" sz="1800" spc="-1" strike="noStrike">
+                <a:latin typeface="Arial"/>
+              </a:rPr>
+              <a:t>Sixth Outline Level</a:t>
+            </a:r>
+            <a:endParaRPr b="0" lang="en-US" sz="1800" spc="-1" strike="noStrike">
+              <a:latin typeface="Arial"/>
+            </a:endParaRPr>
+          </a:p>
+          <a:p>
+            <a:pPr lvl="6" marL="3024000" indent="-216000">
+              <a:spcBef>
+                <a:spcPts val="283"/>
+              </a:spcBef>
+              <a:buClr>
+                <a:srgbClr val="000000"/>
+              </a:buClr>
+              <a:buSzPct val="45000"/>
+              <a:buFont typeface="Wingdings" charset="2"/>
+              <a:buChar char=""/>
+            </a:pPr>
+            <a:r>
+              <a:rPr b="0" lang="en-US" sz="1800" spc="-1" strike="noStrike">
+                <a:latin typeface="Arial"/>
+              </a:rPr>
+              <a:t>Seventh Outline Level</a:t>
+            </a:r>
+            <a:endParaRPr b="0" lang="en-US" sz="1800" spc="-1" strike="noStrike">
+              <a:latin typeface="Arial"/>
+            </a:endParaRPr>
+          </a:p>
+        </p:txBody>
+      </p:sp>
+      <p:sp>
+        <p:nvSpPr>
+          <p:cNvPr id="2" name="PlaceHolder 3"/>
           <p:cNvSpPr>
             <a:spLocks noGrp="1"/>
           </p:cNvSpPr>
@@ -2942,7 +3101,7 @@
         <p:spPr>
           <a:xfrm>
             <a:off x="3029040" y="4767120"/>
-            <a:ext cx="3085560" cy="273240"/>
+            <a:ext cx="3085200" cy="272880"/>
           </a:xfrm>
           <a:prstGeom prst="rect">
             <a:avLst/>
@@ -2988,7 +3147,7 @@
       </p:sp>
       <p:sp>
         <p:nvSpPr>
-          <p:cNvPr id="2" name="PlaceHolder 3"/>
+          <p:cNvPr id="3" name="PlaceHolder 4"/>
           <p:cNvSpPr>
             <a:spLocks noGrp="1"/>
           </p:cNvSpPr>
@@ -2999,7 +3158,7 @@
         <p:spPr>
           <a:xfrm>
             <a:off x="6458040" y="4767120"/>
-            <a:ext cx="2056680" cy="273240"/>
+            <a:ext cx="2056320" cy="272880"/>
           </a:xfrm>
           <a:prstGeom prst="rect">
             <a:avLst/>
@@ -3034,7 +3193,7 @@
               </a:lnSpc>
               <a:buNone/>
             </a:pPr>
-            <a:fld id="{E982894A-1645-46D3-BF5A-768A1899BC93}" type="slidenum">
+            <a:fld id="{AA06D2BF-A505-4FC1-B188-429D7FDCED75}" type="slidenum">
               <a:rPr b="0" lang="en-US" sz="900" spc="-1" strike="noStrike">
                 <a:solidFill>
                   <a:srgbClr val="8b8b8b"/>
@@ -3051,7 +3210,7 @@
       </p:sp>
       <p:sp>
         <p:nvSpPr>
-          <p:cNvPr id="3" name="PlaceHolder 4"/>
+          <p:cNvPr id="4" name="PlaceHolder 5"/>
           <p:cNvSpPr>
             <a:spLocks noGrp="1"/>
           </p:cNvSpPr>
@@ -3062,7 +3221,7 @@
         <p:spPr>
           <a:xfrm>
             <a:off x="628560" y="4767120"/>
-            <a:ext cx="2056680" cy="273240"/>
+            <a:ext cx="2056320" cy="272880"/>
           </a:xfrm>
           <a:prstGeom prst="rect">
             <a:avLst/>
@@ -3092,189 +3251,6 @@
             </a:r>
             <a:endParaRPr b="0" lang="en-US" sz="1400" spc="-1" strike="noStrike">
               <a:latin typeface="Times New Roman"/>
-            </a:endParaRPr>
-          </a:p>
-        </p:txBody>
-      </p:sp>
-      <p:sp>
-        <p:nvSpPr>
-          <p:cNvPr id="4" name="PlaceHolder 5"/>
-          <p:cNvSpPr>
-            <a:spLocks noGrp="1"/>
-          </p:cNvSpPr>
-          <p:nvPr>
-            <p:ph type="body"/>
-          </p:nvPr>
-        </p:nvSpPr>
-        <p:spPr>
-          <a:xfrm>
-            <a:off x="457200" y="1203480"/>
-            <a:ext cx="8229240" cy="2982960"/>
-          </a:xfrm>
-          <a:prstGeom prst="rect">
-            <a:avLst/>
-          </a:prstGeom>
-          <a:noFill/>
-          <a:ln w="0">
-            <a:noFill/>
-          </a:ln>
-        </p:spPr>
-        <p:txBody>
-          <a:bodyPr lIns="0" rIns="0" tIns="0" bIns="0" anchor="t">
-            <a:normAutofit/>
-          </a:bodyPr>
-          <a:p>
-            <a:pPr marL="432000" indent="-324000">
-              <a:spcBef>
-                <a:spcPts val="1417"/>
-              </a:spcBef>
-              <a:buClr>
-                <a:srgbClr val="000000"/>
-              </a:buClr>
-              <a:buSzPct val="45000"/>
-              <a:buFont typeface="Wingdings" charset="2"/>
-              <a:buChar char=""/>
-            </a:pPr>
-            <a:r>
-              <a:rPr b="0" lang="en-US" sz="3200" spc="-1" strike="noStrike">
-                <a:latin typeface="Arial"/>
-              </a:rPr>
-              <a:t>Click to edit the outline text format</a:t>
-            </a:r>
-            <a:endParaRPr b="0" lang="en-US" sz="3200" spc="-1" strike="noStrike">
-              <a:latin typeface="Arial"/>
-            </a:endParaRPr>
-          </a:p>
-          <a:p>
-            <a:pPr lvl="1" marL="864000" indent="-324000">
-              <a:spcBef>
-                <a:spcPts val="1134"/>
-              </a:spcBef>
-              <a:buClr>
-                <a:srgbClr val="000000"/>
-              </a:buClr>
-              <a:buSzPct val="75000"/>
-              <a:buFont typeface="Symbol" charset="2"/>
-              <a:buChar char=""/>
-            </a:pPr>
-            <a:r>
-              <a:rPr b="0" lang="en-US" sz="2800" spc="-1" strike="noStrike">
-                <a:latin typeface="Arial"/>
-              </a:rPr>
-              <a:t>Second Outline Level</a:t>
-            </a:r>
-            <a:endParaRPr b="0" lang="en-US" sz="2800" spc="-1" strike="noStrike">
-              <a:latin typeface="Arial"/>
-            </a:endParaRPr>
-          </a:p>
-          <a:p>
-            <a:pPr lvl="2" marL="1296000" indent="-288000">
-              <a:spcBef>
-                <a:spcPts val="850"/>
-              </a:spcBef>
-              <a:buClr>
-                <a:srgbClr val="000000"/>
-              </a:buClr>
-              <a:buSzPct val="45000"/>
-              <a:buFont typeface="Wingdings" charset="2"/>
-              <a:buChar char=""/>
-            </a:pPr>
-            <a:r>
-              <a:rPr b="0" lang="en-US" sz="2400" spc="-1" strike="noStrike">
-                <a:latin typeface="Arial"/>
-              </a:rPr>
-              <a:t>Third Outline Level</a:t>
-            </a:r>
-            <a:endParaRPr b="0" lang="en-US" sz="2400" spc="-1" strike="noStrike">
-              <a:latin typeface="Arial"/>
-            </a:endParaRPr>
-          </a:p>
-          <a:p>
-            <a:pPr lvl="3" marL="1728000" indent="-216000">
-              <a:spcBef>
-                <a:spcPts val="567"/>
-              </a:spcBef>
-              <a:buClr>
-                <a:srgbClr val="000000"/>
-              </a:buClr>
-              <a:buSzPct val="75000"/>
-              <a:buFont typeface="Symbol" charset="2"/>
-              <a:buChar char=""/>
-            </a:pPr>
-            <a:r>
-              <a:rPr b="0" lang="en-US" sz="2000" spc="-1" strike="noStrike">
-                <a:latin typeface="Arial"/>
-              </a:rPr>
-              <a:t>Fourth Outline Level</a:t>
-            </a:r>
-            <a:endParaRPr b="0" lang="en-US" sz="2000" spc="-1" strike="noStrike">
-              <a:latin typeface="Arial"/>
-            </a:endParaRPr>
-          </a:p>
-          <a:p>
-            <a:pPr lvl="4" marL="2160000" indent="-216000">
-              <a:spcBef>
-                <a:spcPts val="283"/>
-              </a:spcBef>
-              <a:buClr>
-                <a:srgbClr val="000000"/>
-              </a:buClr>
-              <a:buSzPct val="45000"/>
-              <a:buFont typeface="Wingdings" charset="2"/>
-              <a:buChar char=""/>
-            </a:pPr>
-            <a:r>
-              <a:rPr b="0" lang="en-US" sz="2000" spc="-1" strike="noStrike">
-                <a:latin typeface="Arial"/>
-              </a:rPr>
-              <a:t>Fifth Outline Level</a:t>
-            </a:r>
-            <a:endParaRPr b="0" lang="en-US" sz="2000" spc="-1" strike="noStrike">
-              <a:latin typeface="Arial"/>
-            </a:endParaRPr>
-          </a:p>
-          <a:p>
-            <a:pPr lvl="5" marL="2592000" indent="-216000">
-              <a:spcBef>
-                <a:spcPts val="283"/>
-              </a:spcBef>
-              <a:buClr>
-                <a:srgbClr val="000000"/>
-              </a:buClr>
-              <a:buSzPct val="45000"/>
-              <a:buFont typeface="Wingdings" charset="2"/>
-              <a:buChar char=""/>
-            </a:pPr>
-            <a:r>
-              <a:rPr b="0" lang="en-US" sz="2000" spc="-1" strike="noStrike">
-                <a:latin typeface="Arial"/>
-              </a:rPr>
-              <a:t>Sixth Outline Level</a:t>
-            </a:r>
-            <a:endParaRPr b="0" lang="en-US" sz="2000" spc="-1" strike="noStrike">
-              <a:latin typeface="Arial"/>
-            </a:endParaRPr>
-          </a:p>
-          <a:p>
-            <a:pPr lvl="6" marL="3024000" indent="-216000">
-              <a:spcBef>
-                <a:spcPts val="283"/>
-              </a:spcBef>
-              <a:buClr>
-                <a:srgbClr val="000000"/>
-              </a:buClr>
-              <a:buSzPct val="45000"/>
-              <a:buFont typeface="Wingdings" charset="2"/>
-              <a:buChar char=""/>
-            </a:pPr>
-            <a:r>
-              <a:rPr b="0" lang="en-US" sz="2000" spc="-1" strike="noStrike">
-                <a:latin typeface="Arial"/>
-              </a:rPr>
-              <a:t>Seventh Outline Level</a:t>
-            </a:r>
-            <a:endParaRPr b="0" lang="en-US" sz="2000" spc="-1" strike="noStrike">
-              <a:latin typeface="Arial"/>
             </a:endParaRPr>
           </a:p>
         </p:txBody>
@@ -3325,7 +3301,7 @@
         <p:spPr>
           <a:xfrm>
             <a:off x="186840" y="178200"/>
-            <a:ext cx="8769960" cy="4757760"/>
+            <a:ext cx="8769600" cy="4757400"/>
           </a:xfrm>
           <a:prstGeom prst="roundRect">
             <a:avLst>
@@ -3363,7 +3339,7 @@
         <p:spPr>
           <a:xfrm>
             <a:off x="460080" y="4445640"/>
-            <a:ext cx="2998800" cy="269280"/>
+            <a:ext cx="2998440" cy="268920"/>
           </a:xfrm>
           <a:prstGeom prst="rect">
             <a:avLst/>
@@ -3429,7 +3405,7 @@
         <p:spPr>
           <a:xfrm>
             <a:off x="2423160" y="4446360"/>
-            <a:ext cx="290880" cy="290880"/>
+            <a:ext cx="290520" cy="290520"/>
           </a:xfrm>
           <a:prstGeom prst="rect">
             <a:avLst/>
@@ -3448,7 +3424,7 @@
         <p:spPr>
           <a:xfrm>
             <a:off x="460080" y="622080"/>
-            <a:ext cx="6925680" cy="3306600"/>
+            <a:ext cx="6925320" cy="3306240"/>
           </a:xfrm>
           <a:prstGeom prst="rect">
             <a:avLst/>
@@ -3504,7 +3480,7 @@
         <p:spPr>
           <a:xfrm>
             <a:off x="5753880" y="2557440"/>
-            <a:ext cx="4009680" cy="3133080"/>
+            <a:ext cx="4009320" cy="3132720"/>
           </a:xfrm>
           <a:prstGeom prst="rect">
             <a:avLst/>
@@ -3557,7 +3533,7 @@
         <p:spPr>
           <a:xfrm>
             <a:off x="5753880" y="2557440"/>
-            <a:ext cx="4009680" cy="3133080"/>
+            <a:ext cx="4009320" cy="3132720"/>
           </a:xfrm>
           <a:prstGeom prst="rect">
             <a:avLst/>
@@ -3576,7 +3552,7 @@
         <p:spPr>
           <a:xfrm>
             <a:off x="185760" y="831240"/>
-            <a:ext cx="899280" cy="899280"/>
+            <a:ext cx="898920" cy="898920"/>
           </a:xfrm>
           <a:prstGeom prst="ellipse">
             <a:avLst/>
@@ -3636,7 +3612,7 @@
         <p:spPr>
           <a:xfrm>
             <a:off x="185760" y="2381400"/>
-            <a:ext cx="899280" cy="887400"/>
+            <a:ext cx="898920" cy="887040"/>
           </a:xfrm>
           <a:prstGeom prst="ellipse">
             <a:avLst/>
@@ -3696,7 +3672,7 @@
         <p:spPr>
           <a:xfrm>
             <a:off x="185760" y="3860640"/>
-            <a:ext cx="899280" cy="899280"/>
+            <a:ext cx="898920" cy="898920"/>
           </a:xfrm>
           <a:prstGeom prst="ellipse">
             <a:avLst/>
@@ -3756,7 +3732,7 @@
         <p:spPr>
           <a:xfrm>
             <a:off x="967680" y="797040"/>
-            <a:ext cx="3764520" cy="550440"/>
+            <a:ext cx="3764160" cy="550080"/>
           </a:xfrm>
           <a:prstGeom prst="rect">
             <a:avLst/>
@@ -3818,7 +3794,7 @@
         <p:spPr>
           <a:xfrm>
             <a:off x="967680" y="1332720"/>
-            <a:ext cx="3764520" cy="789480"/>
+            <a:ext cx="3764160" cy="789120"/>
           </a:xfrm>
           <a:prstGeom prst="rect">
             <a:avLst/>
@@ -3880,7 +3856,7 @@
         <p:spPr>
           <a:xfrm>
             <a:off x="964080" y="2292480"/>
-            <a:ext cx="3764520" cy="550440"/>
+            <a:ext cx="3764160" cy="550080"/>
           </a:xfrm>
           <a:prstGeom prst="rect">
             <a:avLst/>
@@ -3932,7 +3908,7 @@
         <p:spPr>
           <a:xfrm>
             <a:off x="964080" y="2825280"/>
-            <a:ext cx="3764520" cy="843120"/>
+            <a:ext cx="3764160" cy="842760"/>
           </a:xfrm>
           <a:prstGeom prst="rect">
             <a:avLst/>
@@ -3994,7 +3970,7 @@
         <p:spPr>
           <a:xfrm>
             <a:off x="964080" y="3777840"/>
-            <a:ext cx="3764520" cy="550440"/>
+            <a:ext cx="3764160" cy="550080"/>
           </a:xfrm>
           <a:prstGeom prst="rect">
             <a:avLst/>
@@ -4046,7 +4022,7 @@
         <p:spPr>
           <a:xfrm>
             <a:off x="964080" y="4310640"/>
-            <a:ext cx="3764520" cy="794520"/>
+            <a:ext cx="3764160" cy="794160"/>
           </a:xfrm>
           <a:prstGeom prst="rect">
             <a:avLst/>
@@ -4108,7 +4084,7 @@
         <p:spPr>
           <a:xfrm>
             <a:off x="5084640" y="987840"/>
-            <a:ext cx="3687480" cy="3496680"/>
+            <a:ext cx="3687120" cy="3496320"/>
           </a:xfrm>
           <a:prstGeom prst="roundRect">
             <a:avLst>
@@ -4172,7 +4148,7 @@
         <p:spPr>
           <a:xfrm>
             <a:off x="8519760" y="4831560"/>
-            <a:ext cx="484560" cy="226800"/>
+            <a:ext cx="484200" cy="226800"/>
           </a:xfrm>
           <a:prstGeom prst="rect">
             <a:avLst/>
@@ -4224,7 +4200,7 @@
         <p:spPr>
           <a:xfrm>
             <a:off x="421200" y="228600"/>
-            <a:ext cx="8457840" cy="685440"/>
+            <a:ext cx="8457480" cy="685080"/>
           </a:xfrm>
           <a:prstGeom prst="rect">
             <a:avLst/>
@@ -4253,7 +4229,11 @@
             </a:pPr>
             <a:r>
               <a:rPr b="0" lang="en-US" sz="1800" spc="-1" strike="noStrike">
+                <a:solidFill>
+                  <a:srgbClr val="000000"/>
+                </a:solidFill>
                 <a:latin typeface="Arial"/>
+                <a:ea typeface="DejaVu Sans"/>
               </a:rPr>
               <a:t>TITLE</a:t>
             </a:r>
@@ -4302,7 +4282,7 @@
         <p:spPr>
           <a:xfrm>
             <a:off x="506520" y="1484640"/>
-            <a:ext cx="2556720" cy="2055240"/>
+            <a:ext cx="2556360" cy="2054880"/>
           </a:xfrm>
           <a:prstGeom prst="roundRect">
             <a:avLst>
@@ -4342,7 +4322,7 @@
         <p:spPr>
           <a:xfrm>
             <a:off x="624240" y="1616760"/>
-            <a:ext cx="2289600" cy="729000"/>
+            <a:ext cx="2289240" cy="728640"/>
           </a:xfrm>
           <a:prstGeom prst="rect">
             <a:avLst/>
@@ -4394,7 +4374,7 @@
         <p:spPr>
           <a:xfrm>
             <a:off x="624240" y="2400480"/>
-            <a:ext cx="2289600" cy="1162080"/>
+            <a:ext cx="2289240" cy="1161720"/>
           </a:xfrm>
           <a:prstGeom prst="rect">
             <a:avLst/>
@@ -4456,7 +4436,7 @@
         <p:spPr>
           <a:xfrm>
             <a:off x="3309120" y="2066040"/>
-            <a:ext cx="2556720" cy="2055240"/>
+            <a:ext cx="2556360" cy="2054880"/>
           </a:xfrm>
           <a:prstGeom prst="roundRect">
             <a:avLst>
@@ -4496,7 +4476,7 @@
         <p:spPr>
           <a:xfrm>
             <a:off x="3426840" y="2198160"/>
-            <a:ext cx="2289600" cy="729000"/>
+            <a:ext cx="2289240" cy="728640"/>
           </a:xfrm>
           <a:prstGeom prst="rect">
             <a:avLst/>
@@ -4548,7 +4528,7 @@
         <p:spPr>
           <a:xfrm>
             <a:off x="3426840" y="2981880"/>
-            <a:ext cx="2289600" cy="1162080"/>
+            <a:ext cx="2289240" cy="1161720"/>
           </a:xfrm>
           <a:prstGeom prst="rect">
             <a:avLst/>
@@ -4600,7 +4580,7 @@
         <p:spPr>
           <a:xfrm>
             <a:off x="6111720" y="2659320"/>
-            <a:ext cx="2556720" cy="2055240"/>
+            <a:ext cx="2556360" cy="2054880"/>
           </a:xfrm>
           <a:prstGeom prst="roundRect">
             <a:avLst>
@@ -4640,7 +4620,7 @@
         <p:spPr>
           <a:xfrm>
             <a:off x="6229440" y="2791440"/>
-            <a:ext cx="2289600" cy="729000"/>
+            <a:ext cx="2289240" cy="728640"/>
           </a:xfrm>
           <a:prstGeom prst="rect">
             <a:avLst/>
@@ -4675,7 +4655,7 @@
                 <a:latin typeface="Arial"/>
                 <a:ea typeface="DejaVu Sans"/>
               </a:rPr>
-              <a:t>SUBTITLE2</a:t>
+              <a:t>SUBTITLE3</a:t>
             </a:r>
             <a:endParaRPr b="0" lang="en-US" sz="1400" spc="-1" strike="noStrike">
               <a:latin typeface="Arial"/>
@@ -4692,7 +4672,7 @@
         <p:spPr>
           <a:xfrm>
             <a:off x="6229440" y="3574800"/>
-            <a:ext cx="2289600" cy="1162080"/>
+            <a:ext cx="2289240" cy="1161720"/>
           </a:xfrm>
           <a:prstGeom prst="rect">
             <a:avLst/>
@@ -4727,7 +4707,7 @@
                 <a:latin typeface="Arial"/>
                 <a:ea typeface="DejaVu Sans"/>
               </a:rPr>
-              <a:t>TEXT2</a:t>
+              <a:t>TEXT3</a:t>
             </a:r>
             <a:endParaRPr b="0" lang="en-US" sz="1100" spc="-1" strike="noStrike">
               <a:latin typeface="Arial"/>
@@ -4744,7 +4724,7 @@
         <p:spPr>
           <a:xfrm>
             <a:off x="8519760" y="4831560"/>
-            <a:ext cx="484560" cy="226800"/>
+            <a:ext cx="484200" cy="226800"/>
           </a:xfrm>
           <a:prstGeom prst="rect">
             <a:avLst/>
@@ -4796,7 +4776,7 @@
         <p:spPr>
           <a:xfrm>
             <a:off x="457200" y="228600"/>
-            <a:ext cx="8229240" cy="1142640"/>
+            <a:ext cx="8228880" cy="1142280"/>
           </a:xfrm>
           <a:prstGeom prst="rect">
             <a:avLst/>
@@ -4825,7 +4805,11 @@
             </a:pPr>
             <a:r>
               <a:rPr b="0" lang="en-US" sz="1800" spc="-1" strike="noStrike">
+                <a:solidFill>
+                  <a:srgbClr val="000000"/>
+                </a:solidFill>
                 <a:latin typeface="Arial"/>
+                <a:ea typeface="DejaVu Sans"/>
               </a:rPr>
               <a:t>TITLE</a:t>
             </a:r>
@@ -4874,7 +4858,7 @@
         <p:spPr>
           <a:xfrm>
             <a:off x="186840" y="178200"/>
-            <a:ext cx="8769960" cy="4757760"/>
+            <a:ext cx="8769600" cy="4757400"/>
           </a:xfrm>
           <a:prstGeom prst="roundRect">
             <a:avLst>
@@ -4912,7 +4896,7 @@
         <p:spPr>
           <a:xfrm>
             <a:off x="1640880" y="4489920"/>
-            <a:ext cx="2998800" cy="269280"/>
+            <a:ext cx="2998440" cy="268920"/>
           </a:xfrm>
           <a:prstGeom prst="rect">
             <a:avLst/>
@@ -4974,7 +4958,7 @@
         <p:spPr>
           <a:xfrm>
             <a:off x="867240" y="3488040"/>
-            <a:ext cx="256680" cy="256680"/>
+            <a:ext cx="256320" cy="256320"/>
           </a:xfrm>
           <a:prstGeom prst="ellipse">
             <a:avLst/>
@@ -5009,7 +4993,7 @@
         <p:spPr>
           <a:xfrm>
             <a:off x="351000" y="3691440"/>
-            <a:ext cx="1289160" cy="1133280"/>
+            <a:ext cx="1288800" cy="1132920"/>
           </a:xfrm>
           <a:prstGeom prst="rect">
             <a:avLst/>
@@ -5028,7 +5012,7 @@
         <p:spPr>
           <a:xfrm>
             <a:off x="460080" y="622080"/>
-            <a:ext cx="6925680" cy="3306600"/>
+            <a:ext cx="6925320" cy="3306240"/>
           </a:xfrm>
           <a:prstGeom prst="rect">
             <a:avLst/>
@@ -5084,7 +5068,7 @@
         <p:spPr>
           <a:xfrm>
             <a:off x="5753880" y="2557440"/>
-            <a:ext cx="4009680" cy="3133080"/>
+            <a:ext cx="4009320" cy="3132720"/>
           </a:xfrm>
           <a:prstGeom prst="rect">
             <a:avLst/>
